--- a/data/outputs/v2/Grade11/Biology/Quizzes/SS2.2_Growth_and_Development_in_Plants/Biology_G11_SS2.2_Growth_and_Development_in_Plants_L6_QuickCheck.pptx
+++ b/data/outputs/v2/Grade11/Biology/Quizzes/SS2.2_Growth_and_Development_in_Plants/Biology_G11_SS2.2_Growth_and_Development_in_Plants_L6_QuickCheck.pptx
@@ -1787,7 +1787,7 @@
                 <a:ea typeface="Arial" pitchFamily="34" charset="-122"/>
                 <a:cs typeface="Arial" pitchFamily="34" charset="-120"/>
               </a:rPr>
-              <a:t>Lesson 6: Where Does a Maize or Bean Plant Grow? Measuring Growth and Regions of Growth in Seedlings</a:t>
+              <a:t>Lesson 6: Measuring Growth: Regions of Growth and Growth Curves of Maize H614 and Bean Rosecoco</a:t>
             </a:r>
             <a:endParaRPr lang="en-US" sz="2000" dirty="0"/>
           </a:p>
@@ -2181,7 +2181,7 @@
                 <a:ea typeface="Arial" pitchFamily="34" charset="-122"/>
                 <a:cs typeface="Arial" pitchFamily="34" charset="-120"/>
               </a:rPr>
-              <a:t>Use after: Predict phase</a:t>
+              <a:t>Use after: Observe phase</a:t>
             </a:r>
             <a:endParaRPr lang="en-US" sz="1100" dirty="0"/>
           </a:p>
@@ -2212,17 +2212,17 @@
               <a:buNone/>
             </a:pPr>
             <a:r>
-              <a:rPr lang="en-US" sz="2000" b="1" dirty="0">
-                <a:solidFill>
-                  <a:srgbClr val="FFFFFF"/>
-                </a:solidFill>
-                <a:latin typeface="Arial" pitchFamily="34" charset="0"/>
-                <a:ea typeface="Arial" pitchFamily="34" charset="-122"/>
-                <a:cs typeface="Arial" pitchFamily="34" charset="-120"/>
-              </a:rPr>
-              <a:t>A farmer in Nakuru plants maize and beans. A student predicts where a young root becomes longer. Which prediction best matches how growth in length happens in a root?</a:t>
-            </a:r>
-            <a:endParaRPr lang="en-US" sz="2000" dirty="0"/>
+              <a:rPr lang="en-US" sz="1800" b="1" dirty="0">
+                <a:solidFill>
+                  <a:srgbClr val="FFFFFF"/>
+                </a:solidFill>
+                <a:latin typeface="Arial" pitchFamily="34" charset="0"/>
+                <a:ea typeface="Arial" pitchFamily="34" charset="-122"/>
+                <a:cs typeface="Arial" pitchFamily="34" charset="-120"/>
+              </a:rPr>
+              <a:t>Fatuma's group marks a bean root with ink every 2 mm from the tip for 10 mm. After two days, the marks nearest the tip have spread furthest apart, while the marks further back are still close together. What does this show?</a:t>
+            </a:r>
+            <a:endParaRPr lang="en-US" sz="1800" dirty="0"/>
           </a:p>
         </p:txBody>
       </p:sp>
@@ -2312,17 +2312,17 @@
               <a:buNone/>
             </a:pPr>
             <a:r>
-              <a:rPr lang="en-US" sz="1500" dirty="0">
-                <a:solidFill>
-                  <a:srgbClr val="FFFFFF"/>
-                </a:solidFill>
-                <a:latin typeface="Arial" pitchFamily="34" charset="0"/>
-                <a:ea typeface="Arial" pitchFamily="34" charset="-122"/>
-                <a:cs typeface="Arial" pitchFamily="34" charset="-120"/>
-              </a:rPr>
-              <a:t>Growth happens only at the part of the root closest to the seed</a:t>
-            </a:r>
-            <a:endParaRPr lang="en-US" sz="1500" dirty="0"/>
+              <a:rPr lang="en-US" sz="1700" dirty="0">
+                <a:solidFill>
+                  <a:srgbClr val="FFFFFF"/>
+                </a:solidFill>
+                <a:latin typeface="Arial" pitchFamily="34" charset="0"/>
+                <a:ea typeface="Arial" pitchFamily="34" charset="-122"/>
+                <a:cs typeface="Arial" pitchFamily="34" charset="-120"/>
+              </a:rPr>
+              <a:t>The root grows in length mainly from the base near the seed</a:t>
+            </a:r>
+            <a:endParaRPr lang="en-US" sz="1700" dirty="0"/>
           </a:p>
         </p:txBody>
       </p:sp>
@@ -2412,17 +2412,17 @@
               <a:buNone/>
             </a:pPr>
             <a:r>
-              <a:rPr lang="en-US" sz="1500" dirty="0">
-                <a:solidFill>
-                  <a:srgbClr val="FFFFFF"/>
-                </a:solidFill>
-                <a:latin typeface="Arial" pitchFamily="34" charset="0"/>
-                <a:ea typeface="Arial" pitchFamily="34" charset="-122"/>
-                <a:cs typeface="Arial" pitchFamily="34" charset="-120"/>
-              </a:rPr>
-              <a:t>Growth happens mainly in a region near the root tip, where cells divide and elongate</a:t>
-            </a:r>
-            <a:endParaRPr lang="en-US" sz="1500" dirty="0"/>
+              <a:rPr lang="en-US" sz="1700" dirty="0">
+                <a:solidFill>
+                  <a:srgbClr val="FFFFFF"/>
+                </a:solidFill>
+                <a:latin typeface="Arial" pitchFamily="34" charset="0"/>
+                <a:ea typeface="Arial" pitchFamily="34" charset="-122"/>
+                <a:cs typeface="Arial" pitchFamily="34" charset="-120"/>
+              </a:rPr>
+              <a:t>The root grows in length equally along its whole length</a:t>
+            </a:r>
+            <a:endParaRPr lang="en-US" sz="1700" dirty="0"/>
           </a:p>
         </p:txBody>
       </p:sp>
@@ -2512,17 +2512,17 @@
               <a:buNone/>
             </a:pPr>
             <a:r>
-              <a:rPr lang="en-US" sz="1500" dirty="0">
-                <a:solidFill>
-                  <a:srgbClr val="FFFFFF"/>
-                </a:solidFill>
-                <a:latin typeface="Arial" pitchFamily="34" charset="0"/>
-                <a:ea typeface="Arial" pitchFamily="34" charset="-122"/>
-                <a:cs typeface="Arial" pitchFamily="34" charset="-120"/>
-              </a:rPr>
-              <a:t>Growth happens evenly along the whole length of the root</a:t>
-            </a:r>
-            <a:endParaRPr lang="en-US" sz="1500" dirty="0"/>
+              <a:rPr lang="en-US" sz="1700" dirty="0">
+                <a:solidFill>
+                  <a:srgbClr val="FFFFFF"/>
+                </a:solidFill>
+                <a:latin typeface="Arial" pitchFamily="34" charset="0"/>
+                <a:ea typeface="Arial" pitchFamily="34" charset="-122"/>
+                <a:cs typeface="Arial" pitchFamily="34" charset="-120"/>
+              </a:rPr>
+              <a:t>The root grows in length mainly in a region just behind the tip</a:t>
+            </a:r>
+            <a:endParaRPr lang="en-US" sz="1700" dirty="0"/>
           </a:p>
         </p:txBody>
       </p:sp>
@@ -2612,17 +2612,17 @@
               <a:buNone/>
             </a:pPr>
             <a:r>
-              <a:rPr lang="en-US" sz="1500" dirty="0">
-                <a:solidFill>
-                  <a:srgbClr val="FFFFFF"/>
-                </a:solidFill>
-                <a:latin typeface="Arial" pitchFamily="34" charset="0"/>
-                <a:ea typeface="Arial" pitchFamily="34" charset="-122"/>
-                <a:cs typeface="Arial" pitchFamily="34" charset="-120"/>
-              </a:rPr>
-              <a:t>Growth happens only in the oldest part of the root, far from the tip</a:t>
-            </a:r>
-            <a:endParaRPr lang="en-US" sz="1500" dirty="0"/>
+              <a:rPr lang="en-US" sz="1700" dirty="0">
+                <a:solidFill>
+                  <a:srgbClr val="FFFFFF"/>
+                </a:solidFill>
+                <a:latin typeface="Arial" pitchFamily="34" charset="0"/>
+                <a:ea typeface="Arial" pitchFamily="34" charset="-122"/>
+                <a:cs typeface="Arial" pitchFamily="34" charset="-120"/>
+              </a:rPr>
+              <a:t>The root grows only in thickness and not in length</a:t>
+            </a:r>
+            <a:endParaRPr lang="en-US" sz="1700" dirty="0"/>
           </a:p>
         </p:txBody>
       </p:sp>
@@ -2791,7 +2791,7 @@
                 <a:ea typeface="Arial" pitchFamily="34" charset="-122"/>
                 <a:cs typeface="Arial" pitchFamily="34" charset="-120"/>
               </a:rPr>
-              <a:t>Use after: Observe phase</a:t>
+              <a:t>Use after: Explain phase</a:t>
             </a:r>
             <a:endParaRPr lang="en-US" sz="1100" dirty="0"/>
           </a:p>
@@ -2830,7 +2830,7 @@
                 <a:ea typeface="Arial" pitchFamily="34" charset="-122"/>
                 <a:cs typeface="Arial" pitchFamily="34" charset="-120"/>
               </a:rPr>
-              <a:t>Learners mark a young bean root with ink every 5 mm starting from the tip, then return it to moist soil. After 48 hours they measure the distances between the marks. Which marks will have moved furthest apart?</a:t>
+              <a:t>A student says: 'Marks spreading near the root tip support the idea that new cells are made at the apical meristem and then elongate.' Which order of regions, starting from the very tip of a root, is correct?</a:t>
             </a:r>
             <a:endParaRPr lang="en-US" sz="1800" dirty="0"/>
           </a:p>
@@ -2930,7 +2930,7 @@
                 <a:ea typeface="Arial" pitchFamily="34" charset="-122"/>
                 <a:cs typeface="Arial" pitchFamily="34" charset="-120"/>
               </a:rPr>
-              <a:t>All marks will have moved apart by the same amount</a:t>
+              <a:t>Region of elongation, region of cell division, region of differentiation</a:t>
             </a:r>
             <a:endParaRPr lang="en-US" sz="1700" dirty="0"/>
           </a:p>
@@ -3030,7 +3030,7 @@
                 <a:ea typeface="Arial" pitchFamily="34" charset="-122"/>
                 <a:cs typeface="Arial" pitchFamily="34" charset="-120"/>
               </a:rPr>
-              <a:t>The marks in the oldest part of the root, furthest from the tip</a:t>
+              <a:t>Region of differentiation, region of elongation, region of cell division</a:t>
             </a:r>
             <a:endParaRPr lang="en-US" sz="1700" dirty="0"/>
           </a:p>
@@ -3130,7 +3130,7 @@
                 <a:ea typeface="Arial" pitchFamily="34" charset="-122"/>
                 <a:cs typeface="Arial" pitchFamily="34" charset="-120"/>
               </a:rPr>
-              <a:t>None, because roots only grow in width</a:t>
+              <a:t>Region of cell division, region of differentiation, region of elongation</a:t>
             </a:r>
             <a:endParaRPr lang="en-US" sz="1700" dirty="0"/>
           </a:p>
@@ -3230,7 +3230,7 @@
                 <a:ea typeface="Arial" pitchFamily="34" charset="-122"/>
                 <a:cs typeface="Arial" pitchFamily="34" charset="-120"/>
               </a:rPr>
-              <a:t>The marks nearest the root tip</a:t>
+              <a:t>Region of cell division, region of elongation, region of differentiation</a:t>
             </a:r>
             <a:endParaRPr lang="en-US" sz="1700" dirty="0"/>
           </a:p>
@@ -3432,17 +3432,17 @@
               <a:buNone/>
             </a:pPr>
             <a:r>
-              <a:rPr lang="en-US" sz="2300" b="1" dirty="0">
-                <a:solidFill>
-                  <a:srgbClr val="FFFFFF"/>
-                </a:solidFill>
-                <a:latin typeface="Arial" pitchFamily="34" charset="0"/>
-                <a:ea typeface="Arial" pitchFamily="34" charset="-122"/>
-                <a:cs typeface="Arial" pitchFamily="34" charset="-120"/>
-              </a:rPr>
-              <a:t>In the seedling investigation, why do learners mark the root at equal intervals (for example every 5 mm) from the tip?</a:t>
-            </a:r>
-            <a:endParaRPr lang="en-US" sz="2300" dirty="0"/>
+              <a:rPr lang="en-US" sz="2000" b="1" dirty="0">
+                <a:solidFill>
+                  <a:srgbClr val="FFFFFF"/>
+                </a:solidFill>
+                <a:latin typeface="Arial" pitchFamily="34" charset="0"/>
+                <a:ea typeface="Arial" pitchFamily="34" charset="-122"/>
+                <a:cs typeface="Arial" pitchFamily="34" charset="-120"/>
+              </a:rPr>
+              <a:t>The mean shoot height of maize H614 was 62 cm at Day 28 and 98 cm at Day 35. What was the increase in height between Day 28 and Day 35?</a:t>
+            </a:r>
+            <a:endParaRPr lang="en-US" sz="2000" dirty="0"/>
           </a:p>
         </p:txBody>
       </p:sp>
@@ -3540,7 +3540,7 @@
                 <a:ea typeface="Arial" pitchFamily="34" charset="-122"/>
                 <a:cs typeface="Arial" pitchFamily="34" charset="-120"/>
               </a:rPr>
-              <a:t>So that any change in the distance between marks shows which region has grown</a:t>
+              <a:t>160 cm</a:t>
             </a:r>
             <a:endParaRPr lang="en-US" sz="1700" dirty="0"/>
           </a:p>
@@ -3640,7 +3640,7 @@
                 <a:ea typeface="Arial" pitchFamily="34" charset="-122"/>
                 <a:cs typeface="Arial" pitchFamily="34" charset="-120"/>
               </a:rPr>
-              <a:t>So that the ink dries faster on the root</a:t>
+              <a:t>36 cm</a:t>
             </a:r>
             <a:endParaRPr lang="en-US" sz="1700" dirty="0"/>
           </a:p>
@@ -3740,7 +3740,7 @@
                 <a:ea typeface="Arial" pitchFamily="34" charset="-122"/>
                 <a:cs typeface="Arial" pitchFamily="34" charset="-120"/>
               </a:rPr>
-              <a:t>So that the root grows straighter</a:t>
+              <a:t>27 cm</a:t>
             </a:r>
             <a:endParaRPr lang="en-US" sz="1700" dirty="0"/>
           </a:p>
@@ -3840,7 +3840,7 @@
                 <a:ea typeface="Arial" pitchFamily="34" charset="-122"/>
                 <a:cs typeface="Arial" pitchFamily="34" charset="-120"/>
               </a:rPr>
-              <a:t>So that the seedling grows faster</a:t>
+              <a:t>32 cm</a:t>
             </a:r>
             <a:endParaRPr lang="en-US" sz="1700" dirty="0"/>
           </a:p>
@@ -4050,7 +4050,7 @@
                 <a:ea typeface="Arial" pitchFamily="34" charset="-122"/>
                 <a:cs typeface="Arial" pitchFamily="34" charset="-120"/>
               </a:rPr>
-              <a:t>A maize plant was 4 cm tall on day 7 and 32 cm tall on day 21. What was its average growth rate between day 7 and day 21?</a:t>
+              <a:t>The mean height of bean Rosecoco was 4, 9, 18, 30, 40 and 44 cm at Days 7, 14, 21, 28, 35 and 42. Between which two measurements was the increase in height greatest?</a:t>
             </a:r>
             <a:endParaRPr lang="en-US" sz="2000" dirty="0"/>
           </a:p>
@@ -4150,7 +4150,7 @@
                 <a:ea typeface="Arial" pitchFamily="34" charset="-122"/>
                 <a:cs typeface="Arial" pitchFamily="34" charset="-120"/>
               </a:rPr>
-              <a:t>2 cm per day</a:t>
+              <a:t>Day 14 and Day 21</a:t>
             </a:r>
             <a:endParaRPr lang="en-US" sz="1700" dirty="0"/>
           </a:p>
@@ -4250,7 +4250,7 @@
                 <a:ea typeface="Arial" pitchFamily="34" charset="-122"/>
                 <a:cs typeface="Arial" pitchFamily="34" charset="-120"/>
               </a:rPr>
-              <a:t>1.5 cm per day</a:t>
+              <a:t>Day 21 and Day 28</a:t>
             </a:r>
             <a:endParaRPr lang="en-US" sz="1700" dirty="0"/>
           </a:p>
@@ -4350,7 +4350,7 @@
                 <a:ea typeface="Arial" pitchFamily="34" charset="-122"/>
                 <a:cs typeface="Arial" pitchFamily="34" charset="-120"/>
               </a:rPr>
-              <a:t>4 cm per day</a:t>
+              <a:t>Day 35 and Day 42</a:t>
             </a:r>
             <a:endParaRPr lang="en-US" sz="1700" dirty="0"/>
           </a:p>
@@ -4450,7 +4450,7 @@
                 <a:ea typeface="Arial" pitchFamily="34" charset="-122"/>
                 <a:cs typeface="Arial" pitchFamily="34" charset="-120"/>
               </a:rPr>
-              <a:t>28 cm per day</a:t>
+              <a:t>Day 7 and Day 14</a:t>
             </a:r>
             <a:endParaRPr lang="en-US" sz="1700" dirty="0"/>
           </a:p>
@@ -4621,7 +4621,7 @@
                 <a:ea typeface="Arial" pitchFamily="34" charset="-122"/>
                 <a:cs typeface="Arial" pitchFamily="34" charset="-120"/>
               </a:rPr>
-              <a:t>Use after: Explain phase</a:t>
+              <a:t>Use after: Observe phase</a:t>
             </a:r>
             <a:endParaRPr lang="en-US" sz="1100" dirty="0"/>
           </a:p>
@@ -4652,17 +4652,17 @@
               <a:buNone/>
             </a:pPr>
             <a:r>
-              <a:rPr lang="en-US" sz="2300" b="1" dirty="0">
-                <a:solidFill>
-                  <a:srgbClr val="FFFFFF"/>
-                </a:solidFill>
-                <a:latin typeface="Arial" pitchFamily="34" charset="0"/>
-                <a:ea typeface="Arial" pitchFamily="34" charset="-122"/>
-                <a:cs typeface="Arial" pitchFamily="34" charset="-120"/>
-              </a:rPr>
-              <a:t>On an S-shaped growth curve of a maize plant (height against time), what does the steep middle part show?</a:t>
-            </a:r>
-            <a:endParaRPr lang="en-US" sz="2300" dirty="0"/>
+              <a:rPr lang="en-US" sz="2000" b="1" dirty="0">
+                <a:solidFill>
+                  <a:srgbClr val="FFFFFF"/>
+                </a:solidFill>
+                <a:latin typeface="Arial" pitchFamily="34" charset="0"/>
+                <a:ea typeface="Arial" pitchFamily="34" charset="-122"/>
+                <a:cs typeface="Arial" pitchFamily="34" charset="-120"/>
+              </a:rPr>
+              <a:t>Maize H614 increased by only 9 cm between Day 7 and Day 14 (3 cm to 12 cm), but by 36 cm between Day 28 and Day 35. Which phase of the growth curve does the first period show?</a:t>
+            </a:r>
+            <a:endParaRPr lang="en-US" sz="2000" dirty="0"/>
           </a:p>
         </p:txBody>
       </p:sp>
@@ -4760,7 +4760,7 @@
                 <a:ea typeface="Arial" pitchFamily="34" charset="-122"/>
                 <a:cs typeface="Arial" pitchFamily="34" charset="-120"/>
               </a:rPr>
-              <a:t>Growth has stopped because the plant is mature</a:t>
+              <a:t>Stationary phase, because growth has stopped</a:t>
             </a:r>
             <a:endParaRPr lang="en-US" sz="1700" dirty="0"/>
           </a:p>
@@ -4860,7 +4860,7 @@
                 <a:ea typeface="Arial" pitchFamily="34" charset="-122"/>
                 <a:cs typeface="Arial" pitchFamily="34" charset="-120"/>
               </a:rPr>
-              <a:t>Growth is rapid, with active cell division and photosynthesis</a:t>
+              <a:t>Lag phase, because growth is slow at the start</a:t>
             </a:r>
             <a:endParaRPr lang="en-US" sz="1700" dirty="0"/>
           </a:p>
@@ -4960,7 +4960,7 @@
                 <a:ea typeface="Arial" pitchFamily="34" charset="-122"/>
                 <a:cs typeface="Arial" pitchFamily="34" charset="-120"/>
               </a:rPr>
-              <a:t>Growth is slowing because resources are limited</a:t>
+              <a:t>Death phase, because the plant is weak</a:t>
             </a:r>
             <a:endParaRPr lang="en-US" sz="1700" dirty="0"/>
           </a:p>
@@ -5060,7 +5060,7 @@
                 <a:ea typeface="Arial" pitchFamily="34" charset="-122"/>
                 <a:cs typeface="Arial" pitchFamily="34" charset="-120"/>
               </a:rPr>
-              <a:t>The seed is still using stored food and growth is slow</a:t>
+              <a:t>Log phase, because growth is fastest</a:t>
             </a:r>
             <a:endParaRPr lang="en-US" sz="1700" dirty="0"/>
           </a:p>
@@ -5270,7 +5270,7 @@
                 <a:ea typeface="Arial" pitchFamily="34" charset="-122"/>
                 <a:cs typeface="Arial" pitchFamily="34" charset="-120"/>
               </a:rPr>
-              <a:t>A group is writing a Claim-Evidence-Reasoning statement about where a root grows. Which of these is a piece of EVIDENCE?</a:t>
+              <a:t>Bean Rosecoco was 40 cm tall at Day 35 and 44 cm at Day 42, so its curve is flattening. What does the flattening show?</a:t>
             </a:r>
             <a:endParaRPr lang="en-US" sz="2300" dirty="0"/>
           </a:p>
@@ -5362,17 +5362,17 @@
               <a:buNone/>
             </a:pPr>
             <a:r>
-              <a:rPr lang="en-US" sz="1300" dirty="0">
-                <a:solidFill>
-                  <a:srgbClr val="FFFFFF"/>
-                </a:solidFill>
-                <a:latin typeface="Arial" pitchFamily="34" charset="0"/>
-                <a:ea typeface="Arial" pitchFamily="34" charset="-122"/>
-                <a:cs typeface="Arial" pitchFamily="34" charset="-120"/>
-              </a:rPr>
-              <a:t>Growth in length is concentrated at the root tip.</a:t>
-            </a:r>
-            <a:endParaRPr lang="en-US" sz="1300" dirty="0"/>
+              <a:rPr lang="en-US" sz="1700" dirty="0">
+                <a:solidFill>
+                  <a:srgbClr val="FFFFFF"/>
+                </a:solidFill>
+                <a:latin typeface="Arial" pitchFamily="34" charset="0"/>
+                <a:ea typeface="Arial" pitchFamily="34" charset="-122"/>
+                <a:cs typeface="Arial" pitchFamily="34" charset="-120"/>
+              </a:rPr>
+              <a:t>The bean plant has died</a:t>
+            </a:r>
+            <a:endParaRPr lang="en-US" sz="1700" dirty="0"/>
           </a:p>
         </p:txBody>
       </p:sp>
@@ -5462,17 +5462,17 @@
               <a:buNone/>
             </a:pPr>
             <a:r>
-              <a:rPr lang="en-US" sz="1300" dirty="0">
-                <a:solidFill>
-                  <a:srgbClr val="FFFFFF"/>
-                </a:solidFill>
-                <a:latin typeface="Arial" pitchFamily="34" charset="0"/>
-                <a:ea typeface="Arial" pitchFamily="34" charset="-122"/>
-                <a:cs typeface="Arial" pitchFamily="34" charset="-120"/>
-              </a:rPr>
-              <a:t>All plants grow in the same way.</a:t>
-            </a:r>
-            <a:endParaRPr lang="en-US" sz="1300" dirty="0"/>
+              <a:rPr lang="en-US" sz="1700" dirty="0">
+                <a:solidFill>
+                  <a:srgbClr val="FFFFFF"/>
+                </a:solidFill>
+                <a:latin typeface="Arial" pitchFamily="34" charset="0"/>
+                <a:ea typeface="Arial" pitchFamily="34" charset="-122"/>
+                <a:cs typeface="Arial" pitchFamily="34" charset="-120"/>
+              </a:rPr>
+              <a:t>The bean plant is in the log phase, where growth is fastest</a:t>
+            </a:r>
+            <a:endParaRPr lang="en-US" sz="1700" dirty="0"/>
           </a:p>
         </p:txBody>
       </p:sp>
@@ -5562,17 +5562,17 @@
               <a:buNone/>
             </a:pPr>
             <a:r>
-              <a:rPr lang="en-US" sz="1300" dirty="0">
-                <a:solidFill>
-                  <a:srgbClr val="FFFFFF"/>
-                </a:solidFill>
-                <a:latin typeface="Arial" pitchFamily="34" charset="0"/>
-                <a:ea typeface="Arial" pitchFamily="34" charset="-122"/>
-                <a:cs typeface="Arial" pitchFamily="34" charset="-120"/>
-              </a:rPr>
-              <a:t>This happens because cells in the meristem divide and then elongate.</a:t>
-            </a:r>
-            <a:endParaRPr lang="en-US" sz="1300" dirty="0"/>
+              <a:rPr lang="en-US" sz="1700" dirty="0">
+                <a:solidFill>
+                  <a:srgbClr val="FFFFFF"/>
+                </a:solidFill>
+                <a:latin typeface="Arial" pitchFamily="34" charset="0"/>
+                <a:ea typeface="Arial" pitchFamily="34" charset="-122"/>
+                <a:cs typeface="Arial" pitchFamily="34" charset="-120"/>
+              </a:rPr>
+              <a:t>The bean plant is starting its lag phase</a:t>
+            </a:r>
+            <a:endParaRPr lang="en-US" sz="1700" dirty="0"/>
           </a:p>
         </p:txBody>
       </p:sp>
@@ -5662,17 +5662,17 @@
               <a:buNone/>
             </a:pPr>
             <a:r>
-              <a:rPr lang="en-US" sz="1300" dirty="0">
-                <a:solidFill>
-                  <a:srgbClr val="FFFFFF"/>
-                </a:solidFill>
-                <a:latin typeface="Arial" pitchFamily="34" charset="0"/>
-                <a:ea typeface="Arial" pitchFamily="34" charset="-122"/>
-                <a:cs typeface="Arial" pitchFamily="34" charset="-120"/>
-              </a:rPr>
-              <a:t>The marks nearest the root tip moved 8 mm apart in 48 hours, while marks higher up stayed the same distance apart.</a:t>
-            </a:r>
-            <a:endParaRPr lang="en-US" sz="1300" dirty="0"/>
+              <a:rPr lang="en-US" sz="1700" dirty="0">
+                <a:solidFill>
+                  <a:srgbClr val="FFFFFF"/>
+                </a:solidFill>
+                <a:latin typeface="Arial" pitchFamily="34" charset="0"/>
+                <a:ea typeface="Arial" pitchFamily="34" charset="-122"/>
+                <a:cs typeface="Arial" pitchFamily="34" charset="-120"/>
+              </a:rPr>
+              <a:t>The bean plant is in the stationary phase, where growth slows or stops</a:t>
+            </a:r>
+            <a:endParaRPr lang="en-US" sz="1700" dirty="0"/>
           </a:p>
         </p:txBody>
       </p:sp>
@@ -5841,7 +5841,7 @@
                 <a:ea typeface="Arial" pitchFamily="34" charset="-122"/>
                 <a:cs typeface="Arial" pitchFamily="34" charset="-120"/>
               </a:rPr>
-              <a:t>Use after: DQB phase</a:t>
+              <a:t>Use after: Explain phase</a:t>
             </a:r>
             <a:endParaRPr lang="en-US" sz="1100" dirty="0"/>
           </a:p>
@@ -5872,17 +5872,17 @@
               <a:buNone/>
             </a:pPr>
             <a:r>
-              <a:rPr lang="en-US" sz="2300" b="1" dirty="0">
-                <a:solidFill>
-                  <a:srgbClr val="FFFFFF"/>
-                </a:solidFill>
-                <a:latin typeface="Arial" pitchFamily="34" charset="0"/>
-                <a:ea typeface="Arial" pitchFamily="34" charset="-122"/>
-                <a:cs typeface="Arial" pitchFamily="34" charset="-120"/>
-              </a:rPr>
-              <a:t>Which statement best defines growth in a plant?</a:t>
-            </a:r>
-            <a:endParaRPr lang="en-US" sz="2300" dirty="0"/>
+              <a:rPr lang="en-US" sz="1800" b="1" dirty="0">
+                <a:solidFill>
+                  <a:srgbClr val="FFFFFF"/>
+                </a:solidFill>
+                <a:latin typeface="Arial" pitchFamily="34" charset="0"/>
+                <a:ea typeface="Arial" pitchFamily="34" charset="-122"/>
+                <a:cs typeface="Arial" pitchFamily="34" charset="-120"/>
+              </a:rPr>
+              <a:t>At Day 7, bean Rosecoco was 4 cm tall and maize H614 was 3 cm. At Day 42, maize was 125 cm and bean was 44 cm. A student says: 'Maize must have grown faster than bean all the time.' Which response is correct?</a:t>
+            </a:r>
+            <a:endParaRPr lang="en-US" sz="1800" dirty="0"/>
           </a:p>
         </p:txBody>
       </p:sp>
@@ -5972,17 +5972,17 @@
               <a:buNone/>
             </a:pPr>
             <a:r>
-              <a:rPr lang="en-US" sz="1700" dirty="0">
-                <a:solidFill>
-                  <a:srgbClr val="FFFFFF"/>
-                </a:solidFill>
-                <a:latin typeface="Arial" pitchFamily="34" charset="0"/>
-                <a:ea typeface="Arial" pitchFamily="34" charset="-122"/>
-                <a:cs typeface="Arial" pitchFamily="34" charset="-120"/>
-              </a:rPr>
-              <a:t>Any change in the shape of the plant, with no change in size</a:t>
-            </a:r>
-            <a:endParaRPr lang="en-US" sz="1700" dirty="0"/>
+              <a:rPr lang="en-US" sz="1500" dirty="0">
+                <a:solidFill>
+                  <a:srgbClr val="FFFFFF"/>
+                </a:solidFill>
+                <a:latin typeface="Arial" pitchFamily="34" charset="0"/>
+                <a:ea typeface="Arial" pitchFamily="34" charset="-122"/>
+                <a:cs typeface="Arial" pitchFamily="34" charset="-120"/>
+              </a:rPr>
+              <a:t>Wrong, because bean was taller than maize at Day 7, so maize did not grow faster all the time</a:t>
+            </a:r>
+            <a:endParaRPr lang="en-US" sz="1500" dirty="0"/>
           </a:p>
         </p:txBody>
       </p:sp>
@@ -6072,17 +6072,17 @@
               <a:buNone/>
             </a:pPr>
             <a:r>
-              <a:rPr lang="en-US" sz="1700" dirty="0">
-                <a:solidFill>
-                  <a:srgbClr val="FFFFFF"/>
-                </a:solidFill>
-                <a:latin typeface="Arial" pitchFamily="34" charset="0"/>
-                <a:ea typeface="Arial" pitchFamily="34" charset="-122"/>
-                <a:cs typeface="Arial" pitchFamily="34" charset="-120"/>
-              </a:rPr>
-              <a:t>A temporary increase in size caused by a seed absorbing water</a:t>
-            </a:r>
-            <a:endParaRPr lang="en-US" sz="1700" dirty="0"/>
+              <a:rPr lang="en-US" sz="1500" dirty="0">
+                <a:solidFill>
+                  <a:srgbClr val="FFFFFF"/>
+                </a:solidFill>
+                <a:latin typeface="Arial" pitchFamily="34" charset="0"/>
+                <a:ea typeface="Arial" pitchFamily="34" charset="-122"/>
+                <a:cs typeface="Arial" pitchFamily="34" charset="-120"/>
+              </a:rPr>
+              <a:t>Correct, because maize is taller at Day 42</a:t>
+            </a:r>
+            <a:endParaRPr lang="en-US" sz="1500" dirty="0"/>
           </a:p>
         </p:txBody>
       </p:sp>
@@ -6172,17 +6172,17 @@
               <a:buNone/>
             </a:pPr>
             <a:r>
-              <a:rPr lang="en-US" sz="1700" dirty="0">
-                <a:solidFill>
-                  <a:srgbClr val="FFFFFF"/>
-                </a:solidFill>
-                <a:latin typeface="Arial" pitchFamily="34" charset="0"/>
-                <a:ea typeface="Arial" pitchFamily="34" charset="-122"/>
-                <a:cs typeface="Arial" pitchFamily="34" charset="-120"/>
-              </a:rPr>
-              <a:t>An increase in height only</a:t>
-            </a:r>
-            <a:endParaRPr lang="en-US" sz="1700" dirty="0"/>
+              <a:rPr lang="en-US" sz="1500" dirty="0">
+                <a:solidFill>
+                  <a:srgbClr val="FFFFFF"/>
+                </a:solidFill>
+                <a:latin typeface="Arial" pitchFamily="34" charset="0"/>
+                <a:ea typeface="Arial" pitchFamily="34" charset="-122"/>
+                <a:cs typeface="Arial" pitchFamily="34" charset="-120"/>
+              </a:rPr>
+              <a:t>Wrong, because bean grew faster than maize between Day 28 and Day 42</a:t>
+            </a:r>
+            <a:endParaRPr lang="en-US" sz="1500" dirty="0"/>
           </a:p>
         </p:txBody>
       </p:sp>
@@ -6272,17 +6272,17 @@
               <a:buNone/>
             </a:pPr>
             <a:r>
-              <a:rPr lang="en-US" sz="1700" dirty="0">
-                <a:solidFill>
-                  <a:srgbClr val="FFFFFF"/>
-                </a:solidFill>
-                <a:latin typeface="Arial" pitchFamily="34" charset="0"/>
-                <a:ea typeface="Arial" pitchFamily="34" charset="-122"/>
-                <a:cs typeface="Arial" pitchFamily="34" charset="-120"/>
-              </a:rPr>
-              <a:t>A permanent increase in size and dry mass</a:t>
-            </a:r>
-            <a:endParaRPr lang="en-US" sz="1700" dirty="0"/>
+              <a:rPr lang="en-US" sz="1500" dirty="0">
+                <a:solidFill>
+                  <a:srgbClr val="FFFFFF"/>
+                </a:solidFill>
+                <a:latin typeface="Arial" pitchFamily="34" charset="0"/>
+                <a:ea typeface="Arial" pitchFamily="34" charset="-122"/>
+                <a:cs typeface="Arial" pitchFamily="34" charset="-120"/>
+              </a:rPr>
+              <a:t>Correct, because maize roots are longer than bean roots</a:t>
+            </a:r>
+            <a:endParaRPr lang="en-US" sz="1500" dirty="0"/>
           </a:p>
         </p:txBody>
       </p:sp>
@@ -6482,17 +6482,17 @@
               <a:buNone/>
             </a:pPr>
             <a:r>
-              <a:rPr lang="en-US" sz="2300" b="1" dirty="0">
-                <a:solidFill>
-                  <a:srgbClr val="FFFFFF"/>
-                </a:solidFill>
-                <a:latin typeface="Arial" pitchFamily="34" charset="0"/>
-                <a:ea typeface="Arial" pitchFamily="34" charset="-122"/>
-                <a:cs typeface="Arial" pitchFamily="34" charset="-120"/>
-              </a:rPr>
-              <a:t>Which plant can become thicker through secondary growth, and which tissue is responsible?</a:t>
-            </a:r>
-            <a:endParaRPr lang="en-US" sz="2300" dirty="0"/>
+              <a:rPr lang="en-US" sz="2000" b="1" dirty="0">
+                <a:solidFill>
+                  <a:srgbClr val="FFFFFF"/>
+                </a:solidFill>
+                <a:latin typeface="Arial" pitchFamily="34" charset="0"/>
+                <a:ea typeface="Arial" pitchFamily="34" charset="-122"/>
+                <a:cs typeface="Arial" pitchFamily="34" charset="-120"/>
+              </a:rPr>
+              <a:t>A learner draws a graph of shoot height (y-axis) against time in days (x-axis) for maize H614 over 42 days. Which description matches the overall shape of a normal growth curve?</a:t>
+            </a:r>
+            <a:endParaRPr lang="en-US" sz="2000" dirty="0"/>
           </a:p>
         </p:txBody>
       </p:sp>
@@ -6590,7 +6590,7 @@
                 <a:ea typeface="Arial" pitchFamily="34" charset="-122"/>
                 <a:cs typeface="Arial" pitchFamily="34" charset="-120"/>
               </a:rPr>
-              <a:t>Bean, through the vascular cambium</a:t>
+              <a:t>A curve that rises steeply at first and then falls back to zero</a:t>
             </a:r>
             <a:endParaRPr lang="en-US" sz="1700" dirty="0"/>
           </a:p>
@@ -6690,7 +6690,7 @@
                 <a:ea typeface="Arial" pitchFamily="34" charset="-122"/>
                 <a:cs typeface="Arial" pitchFamily="34" charset="-120"/>
               </a:rPr>
-              <a:t>Maize, through the vascular cambium</a:t>
+              <a:t>A horizontal line</a:t>
             </a:r>
             <a:endParaRPr lang="en-US" sz="1700" dirty="0"/>
           </a:p>
@@ -6790,7 +6790,7 @@
                 <a:ea typeface="Arial" pitchFamily="34" charset="-122"/>
                 <a:cs typeface="Arial" pitchFamily="34" charset="-120"/>
               </a:rPr>
-              <a:t>Maize, through the apical meristem at the shoot tip</a:t>
+              <a:t>A straight line sloping upwards</a:t>
             </a:r>
             <a:endParaRPr lang="en-US" sz="1700" dirty="0"/>
           </a:p>
@@ -6890,7 +6890,7 @@
                 <a:ea typeface="Arial" pitchFamily="34" charset="-122"/>
                 <a:cs typeface="Arial" pitchFamily="34" charset="-120"/>
               </a:rPr>
-              <a:t>Bean, through the apical meristem at the root tip</a:t>
+              <a:t>An S-shaped (sigmoid) curve with lag, log and stationary phases</a:t>
             </a:r>
             <a:endParaRPr lang="en-US" sz="1700" dirty="0"/>
           </a:p>
